--- a/LabBook_20_lorena y maria.pptx
+++ b/LabBook_20_lorena y maria.pptx
@@ -161,7 +161,7 @@
   <pc:docChgLst>
     <pc:chgData name="Lorena Gimeno" userId="548ce772763c7a5c" providerId="LiveId" clId="{24A47F1E-ED8B-4BF7-8ED5-668CDAADF216}"/>
     <pc:docChg chg="custSel modSld">
-      <pc:chgData name="Lorena Gimeno" userId="548ce772763c7a5c" providerId="LiveId" clId="{24A47F1E-ED8B-4BF7-8ED5-668CDAADF216}" dt="2026-05-03T16:10:15.234" v="51" actId="20577"/>
+      <pc:chgData name="Lorena Gimeno" userId="548ce772763c7a5c" providerId="LiveId" clId="{24A47F1E-ED8B-4BF7-8ED5-668CDAADF216}" dt="2026-05-03T16:53:52.671" v="55" actId="14100"/>
       <pc:docMkLst>
         <pc:docMk/>
       </pc:docMkLst>
@@ -308,6 +308,36 @@
             <pc:docMk/>
             <pc:sldMk cId="699864314" sldId="301"/>
             <ac:picMk id="9" creationId="{2E0D2D9C-20DC-D1CF-F6F9-0E9ECD81AE86}"/>
+          </ac:picMkLst>
+        </pc:picChg>
+      </pc:sldChg>
+      <pc:sldChg chg="modSp mod">
+        <pc:chgData name="Lorena Gimeno" userId="548ce772763c7a5c" providerId="LiveId" clId="{24A47F1E-ED8B-4BF7-8ED5-668CDAADF216}" dt="2026-05-03T16:53:52.671" v="55" actId="14100"/>
+        <pc:sldMkLst>
+          <pc:docMk/>
+          <pc:sldMk cId="1558326841" sldId="303"/>
+        </pc:sldMkLst>
+        <pc:picChg chg="mod">
+          <ac:chgData name="Lorena Gimeno" userId="548ce772763c7a5c" providerId="LiveId" clId="{24A47F1E-ED8B-4BF7-8ED5-668CDAADF216}" dt="2026-05-03T16:53:52.671" v="55" actId="14100"/>
+          <ac:picMkLst>
+            <pc:docMk/>
+            <pc:sldMk cId="1558326841" sldId="303"/>
+            <ac:picMk id="20" creationId="{9817408F-E8F4-1712-4477-3F151C7DC6FC}"/>
+          </ac:picMkLst>
+        </pc:picChg>
+      </pc:sldChg>
+      <pc:sldChg chg="modSp mod">
+        <pc:chgData name="Lorena Gimeno" userId="548ce772763c7a5c" providerId="LiveId" clId="{24A47F1E-ED8B-4BF7-8ED5-668CDAADF216}" dt="2026-05-03T16:53:44.498" v="53" actId="1076"/>
+        <pc:sldMkLst>
+          <pc:docMk/>
+          <pc:sldMk cId="4090700512" sldId="305"/>
+        </pc:sldMkLst>
+        <pc:picChg chg="mod">
+          <ac:chgData name="Lorena Gimeno" userId="548ce772763c7a5c" providerId="LiveId" clId="{24A47F1E-ED8B-4BF7-8ED5-668CDAADF216}" dt="2026-05-03T16:53:44.498" v="53" actId="1076"/>
+          <ac:picMkLst>
+            <pc:docMk/>
+            <pc:sldMk cId="4090700512" sldId="305"/>
+            <ac:picMk id="17" creationId="{4E59F9E9-BF55-DBA3-3166-2FB337B2CE36}"/>
           </ac:picMkLst>
         </pc:picChg>
       </pc:sldChg>
@@ -14905,8 +14935,8 @@
         </p:blipFill>
         <p:spPr>
           <a:xfrm>
-            <a:off x="8077200" y="1652470"/>
-            <a:ext cx="3048000" cy="814033"/>
+            <a:off x="7747001" y="1653944"/>
+            <a:ext cx="3741661" cy="999290"/>
           </a:xfrm>
           <a:prstGeom prst="rect">
             <a:avLst/>
@@ -17406,7 +17436,7 @@
         </p:blipFill>
         <p:spPr>
           <a:xfrm>
-            <a:off x="8325239" y="2536619"/>
+            <a:off x="8287333" y="2551378"/>
             <a:ext cx="3512406" cy="1985273"/>
           </a:xfrm>
           <a:prstGeom prst="rect">

--- a/LabBook_20_lorena y maria.pptx
+++ b/LabBook_20_lorena y maria.pptx
@@ -161,7 +161,7 @@
   <pc:docChgLst>
     <pc:chgData name="Lorena Gimeno" userId="548ce772763c7a5c" providerId="LiveId" clId="{24A47F1E-ED8B-4BF7-8ED5-668CDAADF216}"/>
     <pc:docChg chg="custSel modSld">
-      <pc:chgData name="Lorena Gimeno" userId="548ce772763c7a5c" providerId="LiveId" clId="{24A47F1E-ED8B-4BF7-8ED5-668CDAADF216}" dt="2026-05-03T16:53:52.671" v="55" actId="14100"/>
+      <pc:chgData name="Lorena Gimeno" userId="548ce772763c7a5c" providerId="LiveId" clId="{24A47F1E-ED8B-4BF7-8ED5-668CDAADF216}" dt="2026-05-03T16:57:12.293" v="65" actId="1076"/>
       <pc:docMkLst>
         <pc:docMk/>
       </pc:docMkLst>
@@ -177,6 +177,44 @@
             <pc:docMk/>
             <pc:sldMk cId="179796361" sldId="290"/>
             <ac:picMk id="14" creationId="{69CEB966-C816-3A2C-25E1-C6FA5FA3C60F}"/>
+          </ac:picMkLst>
+        </pc:picChg>
+      </pc:sldChg>
+      <pc:sldChg chg="modSp mod">
+        <pc:chgData name="Lorena Gimeno" userId="548ce772763c7a5c" providerId="LiveId" clId="{24A47F1E-ED8B-4BF7-8ED5-668CDAADF216}" dt="2026-05-03T16:54:15.915" v="59" actId="1076"/>
+        <pc:sldMkLst>
+          <pc:docMk/>
+          <pc:sldMk cId="3712356003" sldId="291"/>
+        </pc:sldMkLst>
+        <pc:picChg chg="mod">
+          <ac:chgData name="Lorena Gimeno" userId="548ce772763c7a5c" providerId="LiveId" clId="{24A47F1E-ED8B-4BF7-8ED5-668CDAADF216}" dt="2026-05-03T16:54:15.915" v="59" actId="1076"/>
+          <ac:picMkLst>
+            <pc:docMk/>
+            <pc:sldMk cId="3712356003" sldId="291"/>
+            <ac:picMk id="11" creationId="{340B8339-E11C-F172-EDE9-3D6A82965260}"/>
+          </ac:picMkLst>
+        </pc:picChg>
+      </pc:sldChg>
+      <pc:sldChg chg="modSp mod">
+        <pc:chgData name="Lorena Gimeno" userId="548ce772763c7a5c" providerId="LiveId" clId="{24A47F1E-ED8B-4BF7-8ED5-668CDAADF216}" dt="2026-05-03T16:54:42.216" v="64" actId="1036"/>
+        <pc:sldMkLst>
+          <pc:docMk/>
+          <pc:sldMk cId="2815679427" sldId="294"/>
+        </pc:sldMkLst>
+        <pc:spChg chg="mod">
+          <ac:chgData name="Lorena Gimeno" userId="548ce772763c7a5c" providerId="LiveId" clId="{24A47F1E-ED8B-4BF7-8ED5-668CDAADF216}" dt="2026-05-03T16:54:42.216" v="64" actId="1036"/>
+          <ac:spMkLst>
+            <pc:docMk/>
+            <pc:sldMk cId="2815679427" sldId="294"/>
+            <ac:spMk id="7" creationId="{98DE5FDA-4E91-E843-E84A-1467BFAA9986}"/>
+          </ac:spMkLst>
+        </pc:spChg>
+        <pc:picChg chg="mod">
+          <ac:chgData name="Lorena Gimeno" userId="548ce772763c7a5c" providerId="LiveId" clId="{24A47F1E-ED8B-4BF7-8ED5-668CDAADF216}" dt="2026-05-03T16:54:39.620" v="62" actId="1036"/>
+          <ac:picMkLst>
+            <pc:docMk/>
+            <pc:sldMk cId="2815679427" sldId="294"/>
+            <ac:picMk id="6" creationId="{72F1879C-8265-88BC-D2BF-2E353EDBFB08}"/>
           </ac:picMkLst>
         </pc:picChg>
       </pc:sldChg>
@@ -211,7 +249,7 @@
         </pc:spChg>
       </pc:sldChg>
       <pc:sldChg chg="delSp modSp mod">
-        <pc:chgData name="Lorena Gimeno" userId="548ce772763c7a5c" providerId="LiveId" clId="{24A47F1E-ED8B-4BF7-8ED5-668CDAADF216}" dt="2026-05-03T15:56:55.045" v="14"/>
+        <pc:chgData name="Lorena Gimeno" userId="548ce772763c7a5c" providerId="LiveId" clId="{24A47F1E-ED8B-4BF7-8ED5-668CDAADF216}" dt="2026-05-03T16:54:47.281" v="65" actId="1076"/>
         <pc:sldMkLst>
           <pc:docMk/>
           <pc:sldMk cId="2685215753" sldId="299"/>
@@ -233,7 +271,7 @@
           </ac:picMkLst>
         </pc:picChg>
         <pc:picChg chg="mod">
-          <ac:chgData name="Lorena Gimeno" userId="548ce772763c7a5c" providerId="LiveId" clId="{24A47F1E-ED8B-4BF7-8ED5-668CDAADF216}" dt="2026-05-03T15:56:50.202" v="11" actId="1076"/>
+          <ac:chgData name="Lorena Gimeno" userId="548ce772763c7a5c" providerId="LiveId" clId="{24A47F1E-ED8B-4BF7-8ED5-668CDAADF216}" dt="2026-05-03T16:54:47.281" v="65" actId="1076"/>
           <ac:picMkLst>
             <pc:docMk/>
             <pc:sldMk cId="2685215753" sldId="299"/>
@@ -312,17 +350,25 @@
         </pc:picChg>
       </pc:sldChg>
       <pc:sldChg chg="modSp mod">
-        <pc:chgData name="Lorena Gimeno" userId="548ce772763c7a5c" providerId="LiveId" clId="{24A47F1E-ED8B-4BF7-8ED5-668CDAADF216}" dt="2026-05-03T16:53:52.671" v="55" actId="14100"/>
+        <pc:chgData name="Lorena Gimeno" userId="548ce772763c7a5c" providerId="LiveId" clId="{24A47F1E-ED8B-4BF7-8ED5-668CDAADF216}" dt="2026-05-03T16:53:59.664" v="57" actId="1076"/>
         <pc:sldMkLst>
           <pc:docMk/>
           <pc:sldMk cId="1558326841" sldId="303"/>
         </pc:sldMkLst>
         <pc:picChg chg="mod">
-          <ac:chgData name="Lorena Gimeno" userId="548ce772763c7a5c" providerId="LiveId" clId="{24A47F1E-ED8B-4BF7-8ED5-668CDAADF216}" dt="2026-05-03T16:53:52.671" v="55" actId="14100"/>
+          <ac:chgData name="Lorena Gimeno" userId="548ce772763c7a5c" providerId="LiveId" clId="{24A47F1E-ED8B-4BF7-8ED5-668CDAADF216}" dt="2026-05-03T16:53:54.856" v="56" actId="14100"/>
           <ac:picMkLst>
             <pc:docMk/>
             <pc:sldMk cId="1558326841" sldId="303"/>
             <ac:picMk id="20" creationId="{9817408F-E8F4-1712-4477-3F151C7DC6FC}"/>
+          </ac:picMkLst>
+        </pc:picChg>
+        <pc:picChg chg="mod">
+          <ac:chgData name="Lorena Gimeno" userId="548ce772763c7a5c" providerId="LiveId" clId="{24A47F1E-ED8B-4BF7-8ED5-668CDAADF216}" dt="2026-05-03T16:53:59.664" v="57" actId="1076"/>
+          <ac:picMkLst>
+            <pc:docMk/>
+            <pc:sldMk cId="1558326841" sldId="303"/>
+            <ac:picMk id="22" creationId="{3F8FC60F-4029-60D0-9E81-AAE90079CF0A}"/>
           </ac:picMkLst>
         </pc:picChg>
       </pc:sldChg>
@@ -5204,7 +5250,7 @@
         </p:nvSpPr>
         <p:spPr>
           <a:xfrm>
-            <a:off x="609441" y="1377510"/>
+            <a:off x="609441" y="1395798"/>
             <a:ext cx="11199971" cy="3306028"/>
           </a:xfrm>
           <a:prstGeom prst="rect">
@@ -5294,8 +5340,8 @@
         </p:blipFill>
         <p:spPr>
           <a:xfrm>
-            <a:off x="1544052" y="2029922"/>
-            <a:ext cx="2949763" cy="2124315"/>
+            <a:off x="1288020" y="1820948"/>
+            <a:ext cx="3384564" cy="2437443"/>
           </a:xfrm>
           <a:prstGeom prst="rect">
             <a:avLst/>
@@ -5702,7 +5748,7 @@
         </p:blipFill>
         <p:spPr>
           <a:xfrm>
-            <a:off x="1106264" y="1938191"/>
+            <a:off x="1307432" y="1938191"/>
             <a:ext cx="3267775" cy="2444023"/>
           </a:xfrm>
           <a:prstGeom prst="rect">
@@ -8069,8 +8115,8 @@
           </a:prstGeom>
         </p:spPr>
       </p:pic>
-      <mc:AlternateContent xmlns:mc="http://schemas.openxmlformats.org/markup-compatibility/2006">
-        <mc:Choice xmlns:a14="http://schemas.microsoft.com/office/drawing/2010/main" Requires="a14">
+      <mc:AlternateContent xmlns:mc="http://schemas.openxmlformats.org/markup-compatibility/2006" xmlns:a14="http://schemas.microsoft.com/office/drawing/2010/main">
+        <mc:Choice Requires="a14">
           <p:sp>
             <p:nvSpPr>
               <p:cNvPr id="14" name="CuadroTexto 13">
@@ -8882,7 +8928,7 @@
             </p:txBody>
           </p:sp>
         </mc:Choice>
-        <mc:Fallback>
+        <mc:Fallback xmlns="">
           <p:sp>
             <p:nvSpPr>
               <p:cNvPr id="14" name="CuadroTexto 13">
@@ -9964,8 +10010,8 @@
           </a:p>
         </p:txBody>
       </p:sp>
-      <mc:AlternateContent xmlns:mc="http://schemas.openxmlformats.org/markup-compatibility/2006">
-        <mc:Choice xmlns:a14="http://schemas.microsoft.com/office/drawing/2010/main" Requires="a14">
+      <mc:AlternateContent xmlns:mc="http://schemas.openxmlformats.org/markup-compatibility/2006" xmlns:a14="http://schemas.microsoft.com/office/drawing/2010/main">
+        <mc:Choice Requires="a14">
           <p:sp>
             <p:nvSpPr>
               <p:cNvPr id="2" name="CuadroTexto 1">
@@ -10758,7 +10804,7 @@
             </p:txBody>
           </p:sp>
         </mc:Choice>
-        <mc:Fallback>
+        <mc:Fallback xmlns="">
           <p:sp>
             <p:nvSpPr>
               <p:cNvPr id="2" name="CuadroTexto 1">
@@ -17437,7 +17483,7 @@
         <p:spPr>
           <a:xfrm>
             <a:off x="8287333" y="2551378"/>
-            <a:ext cx="3512406" cy="1985273"/>
+            <a:ext cx="3392877" cy="1917713"/>
           </a:xfrm>
           <a:prstGeom prst="rect">
             <a:avLst/>
@@ -17466,7 +17512,7 @@
         </p:blipFill>
         <p:spPr>
           <a:xfrm>
-            <a:off x="9343423" y="568291"/>
+            <a:off x="9343423" y="537156"/>
             <a:ext cx="1976277" cy="1696945"/>
           </a:xfrm>
           <a:prstGeom prst="rect">
@@ -18334,8 +18380,8 @@
         </p:blipFill>
         <p:spPr>
           <a:xfrm>
-            <a:off x="7057659" y="1697854"/>
-            <a:ext cx="4014087" cy="2487898"/>
+            <a:off x="6883366" y="1472813"/>
+            <a:ext cx="4396922" cy="2725176"/>
           </a:xfrm>
           <a:prstGeom prst="rect">
             <a:avLst/>
